--- a/rules/Tables Diriyah.pptx
+++ b/rules/Tables Diriyah.pptx
@@ -105,6 +105,11 @@
       </a:defRPr>
     </a:lvl9pPr>
   </p:defaultTextStyle>
+  <p:extLst>
+    <p:ext uri="{EFAFB233-063F-42B5-8137-9DF3F51BA10A}">
+      <p15:sldGuideLst xmlns:p15="http://schemas.microsoft.com/office/powerpoint/2012/main"/>
+    </p:ext>
+  </p:extLst>
 </p:presentation>
 </file>
 
@@ -255,7 +260,7 @@
           <a:p>
             <a:fld id="{36CFBD42-A66B-4F08-8394-AAC383301099}" type="datetimeFigureOut">
               <a:rPr lang="en-US" smtClean="0"/>
-              <a:t>6/11/2026</a:t>
+              <a:t>6/14/2026</a:t>
             </a:fld>
             <a:endParaRPr lang="en-US"/>
           </a:p>
@@ -453,7 +458,7 @@
           <a:p>
             <a:fld id="{36CFBD42-A66B-4F08-8394-AAC383301099}" type="datetimeFigureOut">
               <a:rPr lang="en-US" smtClean="0"/>
-              <a:t>6/11/2026</a:t>
+              <a:t>6/14/2026</a:t>
             </a:fld>
             <a:endParaRPr lang="en-US"/>
           </a:p>
@@ -661,7 +666,7 @@
           <a:p>
             <a:fld id="{36CFBD42-A66B-4F08-8394-AAC383301099}" type="datetimeFigureOut">
               <a:rPr lang="en-US" smtClean="0"/>
-              <a:t>6/11/2026</a:t>
+              <a:t>6/14/2026</a:t>
             </a:fld>
             <a:endParaRPr lang="en-US"/>
           </a:p>
@@ -859,7 +864,7 @@
           <a:p>
             <a:fld id="{36CFBD42-A66B-4F08-8394-AAC383301099}" type="datetimeFigureOut">
               <a:rPr lang="en-US" smtClean="0"/>
-              <a:t>6/11/2026</a:t>
+              <a:t>6/14/2026</a:t>
             </a:fld>
             <a:endParaRPr lang="en-US"/>
           </a:p>
@@ -1134,7 +1139,7 @@
           <a:p>
             <a:fld id="{36CFBD42-A66B-4F08-8394-AAC383301099}" type="datetimeFigureOut">
               <a:rPr lang="en-US" smtClean="0"/>
-              <a:t>6/11/2026</a:t>
+              <a:t>6/14/2026</a:t>
             </a:fld>
             <a:endParaRPr lang="en-US"/>
           </a:p>
@@ -1399,7 +1404,7 @@
           <a:p>
             <a:fld id="{36CFBD42-A66B-4F08-8394-AAC383301099}" type="datetimeFigureOut">
               <a:rPr lang="en-US" smtClean="0"/>
-              <a:t>6/11/2026</a:t>
+              <a:t>6/14/2026</a:t>
             </a:fld>
             <a:endParaRPr lang="en-US"/>
           </a:p>
@@ -1811,7 +1816,7 @@
           <a:p>
             <a:fld id="{36CFBD42-A66B-4F08-8394-AAC383301099}" type="datetimeFigureOut">
               <a:rPr lang="en-US" smtClean="0"/>
-              <a:t>6/11/2026</a:t>
+              <a:t>6/14/2026</a:t>
             </a:fld>
             <a:endParaRPr lang="en-US"/>
           </a:p>
@@ -1952,7 +1957,7 @@
           <a:p>
             <a:fld id="{36CFBD42-A66B-4F08-8394-AAC383301099}" type="datetimeFigureOut">
               <a:rPr lang="en-US" smtClean="0"/>
-              <a:t>6/11/2026</a:t>
+              <a:t>6/14/2026</a:t>
             </a:fld>
             <a:endParaRPr lang="en-US"/>
           </a:p>
@@ -2065,7 +2070,7 @@
           <a:p>
             <a:fld id="{36CFBD42-A66B-4F08-8394-AAC383301099}" type="datetimeFigureOut">
               <a:rPr lang="en-US" smtClean="0"/>
-              <a:t>6/11/2026</a:t>
+              <a:t>6/14/2026</a:t>
             </a:fld>
             <a:endParaRPr lang="en-US"/>
           </a:p>
@@ -2376,7 +2381,7 @@
           <a:p>
             <a:fld id="{36CFBD42-A66B-4F08-8394-AAC383301099}" type="datetimeFigureOut">
               <a:rPr lang="en-US" smtClean="0"/>
-              <a:t>6/11/2026</a:t>
+              <a:t>6/14/2026</a:t>
             </a:fld>
             <a:endParaRPr lang="en-US"/>
           </a:p>
@@ -2664,7 +2669,7 @@
           <a:p>
             <a:fld id="{36CFBD42-A66B-4F08-8394-AAC383301099}" type="datetimeFigureOut">
               <a:rPr lang="en-US" smtClean="0"/>
-              <a:t>6/11/2026</a:t>
+              <a:t>6/14/2026</a:t>
             </a:fld>
             <a:endParaRPr lang="en-US"/>
           </a:p>
@@ -2905,7 +2910,7 @@
           <a:p>
             <a:fld id="{36CFBD42-A66B-4F08-8394-AAC383301099}" type="datetimeFigureOut">
               <a:rPr lang="en-US" smtClean="0"/>
-              <a:t>6/11/2026</a:t>
+              <a:t>6/14/2026</a:t>
             </a:fld>
             <a:endParaRPr lang="en-US"/>
           </a:p>
@@ -3337,14 +3342,14 @@
           <p:nvPr>
             <p:extLst>
               <p:ext uri="{D42A27DB-BD31-4B8C-83A1-F6EECF244321}">
-                <p14:modId xmlns:p14="http://schemas.microsoft.com/office/powerpoint/2010/main" val="812150598"/>
+                <p14:modId xmlns:p14="http://schemas.microsoft.com/office/powerpoint/2010/main" val="514585626"/>
               </p:ext>
             </p:extLst>
           </p:nvPr>
         </p:nvGraphicFramePr>
         <p:xfrm>
           <a:off x="2032000" y="88070"/>
-          <a:ext cx="8128000" cy="6405880"/>
+          <a:ext cx="8128000" cy="6527800"/>
         </p:xfrm>
         <a:graphic>
           <a:graphicData uri="http://schemas.openxmlformats.org/drawingml/2006/table">
@@ -3412,7 +3417,14 @@
                       <a:pPr algn="l"/>
                       <a:r>
                         <a:rPr lang="en-US" dirty="0"/>
-                        <a:t>SETTLEMENT</a:t>
+                        <a:t>SETTLEMENT/ </a:t>
+                      </a:r>
+                    </a:p>
+                    <a:p>
+                      <a:pPr algn="l"/>
+                      <a:r>
+                        <a:rPr lang="en-US" dirty="0"/>
+                        <a:t>APPROACH</a:t>
                       </a:r>
                     </a:p>
                   </a:txBody>
@@ -3496,14 +3508,7 @@
                       <a:pPr algn="ctr"/>
                       <a:r>
                         <a:rPr lang="en-US" sz="4400" dirty="0"/>
-                        <a:t>4</a:t>
-                      </a:r>
-                    </a:p>
-                    <a:p>
-                      <a:pPr algn="ctr"/>
-                      <a:r>
-                        <a:rPr lang="en-US" sz="1600" dirty="0"/>
-                        <a:t>no cavalry</a:t>
+                        <a:t>2</a:t>
                       </a:r>
                     </a:p>
                   </a:txBody>
@@ -3538,7 +3543,7 @@
                       <a:pPr algn="ctr"/>
                       <a:r>
                         <a:rPr lang="en-US" sz="4400" dirty="0"/>
-                        <a:t>2</a:t>
+                        <a:t>4</a:t>
                       </a:r>
                     </a:p>
                   </a:txBody>
@@ -3575,6 +3580,17 @@
                         <a:rPr lang="en-US" sz="4400" dirty="0"/>
                         <a:t>-2 Supply</a:t>
                       </a:r>
+                      <a:r>
+                        <a:rPr lang="en-US" sz="2000" dirty="0"/>
+                        <a:t> </a:t>
+                      </a:r>
+                    </a:p>
+                    <a:p>
+                      <a:pPr algn="ctr"/>
+                      <a:r>
+                        <a:rPr lang="en-US" sz="2000" dirty="0"/>
+                        <a:t>when captured</a:t>
+                      </a:r>
                     </a:p>
                   </a:txBody>
                   <a:tcPr anchor="ctr"/>
@@ -3608,7 +3624,22 @@
                       <a:pPr algn="ctr"/>
                       <a:r>
                         <a:rPr lang="en-US" sz="4400" dirty="0"/>
-                        <a:t>-1 Morale</a:t>
+                        <a:t>-1 </a:t>
+                      </a:r>
+                      <a:r>
+                        <a:rPr lang="en-US" sz="4400" b="0" dirty="0"/>
+                        <a:t>Morale</a:t>
+                      </a:r>
+                      <a:r>
+                        <a:rPr lang="en-US" sz="2000" dirty="0"/>
+                        <a:t> </a:t>
+                      </a:r>
+                    </a:p>
+                    <a:p>
+                      <a:pPr algn="ctr"/>
+                      <a:r>
+                        <a:rPr lang="en-US" sz="2000" dirty="0"/>
+                        <a:t>when captured</a:t>
                       </a:r>
                     </a:p>
                   </a:txBody>
@@ -3746,10 +3777,10 @@
       </p:pic>
       <p:pic>
         <p:nvPicPr>
-          <p:cNvPr id="16" name="Picture 15">
-            <a:extLst>
-              <a:ext uri="{FF2B5EF4-FFF2-40B4-BE49-F238E27FC236}">
-                <a16:creationId xmlns:a16="http://schemas.microsoft.com/office/drawing/2014/main" id="{6122A53B-E31B-DEFD-9469-E1CCCE70829A}"/>
+          <p:cNvPr id="3" name="Picture 2">
+            <a:extLst>
+              <a:ext uri="{FF2B5EF4-FFF2-40B4-BE49-F238E27FC236}">
+                <a16:creationId xmlns:a16="http://schemas.microsoft.com/office/drawing/2014/main" id="{8212EAE3-ADE2-ABBE-C5F9-679A7E1CF9DE}"/>
               </a:ext>
             </a:extLst>
           </p:cNvPr>
@@ -3766,8 +3797,8 @@
         </p:blipFill>
         <p:spPr>
           <a:xfrm>
-            <a:off x="4418868" y="4509217"/>
-            <a:ext cx="893093" cy="894126"/>
+            <a:off x="4434818" y="5635748"/>
+            <a:ext cx="893093" cy="909331"/>
           </a:xfrm>
           <a:prstGeom prst="rect">
             <a:avLst/>
@@ -3776,10 +3807,10 @@
       </p:pic>
       <p:pic>
         <p:nvPicPr>
-          <p:cNvPr id="20" name="Picture 19">
-            <a:extLst>
-              <a:ext uri="{FF2B5EF4-FFF2-40B4-BE49-F238E27FC236}">
-                <a16:creationId xmlns:a16="http://schemas.microsoft.com/office/drawing/2014/main" id="{701689CC-69D0-6214-B65D-117089F714BB}"/>
+          <p:cNvPr id="7" name="Picture 6">
+            <a:extLst>
+              <a:ext uri="{FF2B5EF4-FFF2-40B4-BE49-F238E27FC236}">
+                <a16:creationId xmlns:a16="http://schemas.microsoft.com/office/drawing/2014/main" id="{7FDD97F5-3452-1443-1DCB-4AB72C2AACB1}"/>
               </a:ext>
             </a:extLst>
           </p:cNvPr>
@@ -3796,8 +3827,8 @@
         </p:blipFill>
         <p:spPr>
           <a:xfrm>
-            <a:off x="4357490" y="5484537"/>
-            <a:ext cx="958793" cy="958793"/>
+            <a:off x="4372109" y="4491697"/>
+            <a:ext cx="1059825" cy="1106309"/>
           </a:xfrm>
           <a:prstGeom prst="rect">
             <a:avLst/>
@@ -3902,7 +3933,7 @@
           <p:nvPr>
             <p:extLst>
               <p:ext uri="{D42A27DB-BD31-4B8C-83A1-F6EECF244321}">
-                <p14:modId xmlns:p14="http://schemas.microsoft.com/office/powerpoint/2010/main" val="3115811780"/>
+                <p14:modId xmlns:p14="http://schemas.microsoft.com/office/powerpoint/2010/main" val="3076529267"/>
               </p:ext>
             </p:extLst>
           </p:nvPr>
@@ -4376,7 +4407,7 @@
                       <a:pPr algn="ctr"/>
                       <a:r>
                         <a:rPr lang="en-US" sz="1400" dirty="0"/>
-                        <a:t>2 CP PER SIEGE LEVEL</a:t>
+                        <a:t>4 CP PER SIEGE LEVEL</a:t>
                       </a:r>
                     </a:p>
                   </a:txBody>

--- a/rules/Tables Diriyah.pptx
+++ b/rules/Tables Diriyah.pptx
@@ -260,7 +260,7 @@
           <a:p>
             <a:fld id="{36CFBD42-A66B-4F08-8394-AAC383301099}" type="datetimeFigureOut">
               <a:rPr lang="en-US" smtClean="0"/>
-              <a:t>6/14/2026</a:t>
+              <a:t>6/17/2026</a:t>
             </a:fld>
             <a:endParaRPr lang="en-US"/>
           </a:p>
@@ -458,7 +458,7 @@
           <a:p>
             <a:fld id="{36CFBD42-A66B-4F08-8394-AAC383301099}" type="datetimeFigureOut">
               <a:rPr lang="en-US" smtClean="0"/>
-              <a:t>6/14/2026</a:t>
+              <a:t>6/17/2026</a:t>
             </a:fld>
             <a:endParaRPr lang="en-US"/>
           </a:p>
@@ -666,7 +666,7 @@
           <a:p>
             <a:fld id="{36CFBD42-A66B-4F08-8394-AAC383301099}" type="datetimeFigureOut">
               <a:rPr lang="en-US" smtClean="0"/>
-              <a:t>6/14/2026</a:t>
+              <a:t>6/17/2026</a:t>
             </a:fld>
             <a:endParaRPr lang="en-US"/>
           </a:p>
@@ -864,7 +864,7 @@
           <a:p>
             <a:fld id="{36CFBD42-A66B-4F08-8394-AAC383301099}" type="datetimeFigureOut">
               <a:rPr lang="en-US" smtClean="0"/>
-              <a:t>6/14/2026</a:t>
+              <a:t>6/17/2026</a:t>
             </a:fld>
             <a:endParaRPr lang="en-US"/>
           </a:p>
@@ -1139,7 +1139,7 @@
           <a:p>
             <a:fld id="{36CFBD42-A66B-4F08-8394-AAC383301099}" type="datetimeFigureOut">
               <a:rPr lang="en-US" smtClean="0"/>
-              <a:t>6/14/2026</a:t>
+              <a:t>6/17/2026</a:t>
             </a:fld>
             <a:endParaRPr lang="en-US"/>
           </a:p>
@@ -1404,7 +1404,7 @@
           <a:p>
             <a:fld id="{36CFBD42-A66B-4F08-8394-AAC383301099}" type="datetimeFigureOut">
               <a:rPr lang="en-US" smtClean="0"/>
-              <a:t>6/14/2026</a:t>
+              <a:t>6/17/2026</a:t>
             </a:fld>
             <a:endParaRPr lang="en-US"/>
           </a:p>
@@ -1816,7 +1816,7 @@
           <a:p>
             <a:fld id="{36CFBD42-A66B-4F08-8394-AAC383301099}" type="datetimeFigureOut">
               <a:rPr lang="en-US" smtClean="0"/>
-              <a:t>6/14/2026</a:t>
+              <a:t>6/17/2026</a:t>
             </a:fld>
             <a:endParaRPr lang="en-US"/>
           </a:p>
@@ -1957,7 +1957,7 @@
           <a:p>
             <a:fld id="{36CFBD42-A66B-4F08-8394-AAC383301099}" type="datetimeFigureOut">
               <a:rPr lang="en-US" smtClean="0"/>
-              <a:t>6/14/2026</a:t>
+              <a:t>6/17/2026</a:t>
             </a:fld>
             <a:endParaRPr lang="en-US"/>
           </a:p>
@@ -2070,7 +2070,7 @@
           <a:p>
             <a:fld id="{36CFBD42-A66B-4F08-8394-AAC383301099}" type="datetimeFigureOut">
               <a:rPr lang="en-US" smtClean="0"/>
-              <a:t>6/14/2026</a:t>
+              <a:t>6/17/2026</a:t>
             </a:fld>
             <a:endParaRPr lang="en-US"/>
           </a:p>
@@ -2381,7 +2381,7 @@
           <a:p>
             <a:fld id="{36CFBD42-A66B-4F08-8394-AAC383301099}" type="datetimeFigureOut">
               <a:rPr lang="en-US" smtClean="0"/>
-              <a:t>6/14/2026</a:t>
+              <a:t>6/17/2026</a:t>
             </a:fld>
             <a:endParaRPr lang="en-US"/>
           </a:p>
@@ -2669,7 +2669,7 @@
           <a:p>
             <a:fld id="{36CFBD42-A66B-4F08-8394-AAC383301099}" type="datetimeFigureOut">
               <a:rPr lang="en-US" smtClean="0"/>
-              <a:t>6/14/2026</a:t>
+              <a:t>6/17/2026</a:t>
             </a:fld>
             <a:endParaRPr lang="en-US"/>
           </a:p>
@@ -2910,7 +2910,7 @@
           <a:p>
             <a:fld id="{36CFBD42-A66B-4F08-8394-AAC383301099}" type="datetimeFigureOut">
               <a:rPr lang="en-US" smtClean="0"/>
-              <a:t>6/14/2026</a:t>
+              <a:t>6/17/2026</a:t>
             </a:fld>
             <a:endParaRPr lang="en-US"/>
           </a:p>
@@ -3933,7 +3933,7 @@
           <p:nvPr>
             <p:extLst>
               <p:ext uri="{D42A27DB-BD31-4B8C-83A1-F6EECF244321}">
-                <p14:modId xmlns:p14="http://schemas.microsoft.com/office/powerpoint/2010/main" val="3076529267"/>
+                <p14:modId xmlns:p14="http://schemas.microsoft.com/office/powerpoint/2010/main" val="3862683659"/>
               </p:ext>
             </p:extLst>
           </p:nvPr>
@@ -4477,7 +4477,7 @@
                       <a:pPr algn="ctr"/>
                       <a:r>
                         <a:rPr lang="en-US" sz="1400" dirty="0"/>
-                        <a:t>2 CP PER TRENCH MARKER</a:t>
+                        <a:t>1 CP PER TRENCH MARKER</a:t>
                       </a:r>
                     </a:p>
                   </a:txBody>
@@ -4506,8 +4506,13 @@
                       </a:r>
                       <a:r>
                         <a:rPr lang="en-US" sz="1400" dirty="0"/>
-                        <a:t>TO ANY SPACE (1 PER SPACE)</a:t>
-                      </a:r>
+                        <a:t>TO ANY </a:t>
+                      </a:r>
+                      <a:r>
+                        <a:rPr lang="en-US" sz="1400"/>
+                        <a:t>SPACE </a:t>
+                      </a:r>
+                      <a:endParaRPr lang="en-US" sz="1400" dirty="0"/>
                     </a:p>
                   </a:txBody>
                   <a:tcPr marL="80682" marR="80682" marT="40341" marB="40341" anchor="ctr">
